--- a/classes/parte-18-ia-aplicada-a-la-ciberseguridad/332-agentes-de-ia-y-el-model-context-protocol-mcp-para-seguridad/clase-332-presentacion.pptx
+++ b/classes/parte-18-ia-aplicada-a-la-ciberseguridad/332-agentes-de-ia-y-el-model-context-protocol-mcp-para-seguridad/clase-332-presentacion.pptx
@@ -17,6 +17,10 @@
     <p:sldId id="265" r:id="rId16"/>
     <p:sldId id="266" r:id="rId17"/>
     <p:sldId id="267" r:id="rId18"/>
+    <p:sldId id="268" r:id="rId19"/>
+    <p:sldId id="269" r:id="rId20"/>
+    <p:sldId id="270" r:id="rId21"/>
+    <p:sldId id="271" r:id="rId22"/>
   </p:sldIdLst>
   <p:sldSz cx="9144000" cy="6858000" type="screen4x3"/>
   <p:notesSz cx="6858000" cy="9144000"/>
@@ -3198,7 +3202,7 @@
                   <a:srgbClr val="0B3D2E"/>
                 </a:solidFill>
               </a:rPr>
-              <a:t>⚠️ Errores comunes</a:t>
+              <a:t>🧪 Laboratorio guiado</a:t>
             </a:r>
           </a:p>
         </p:txBody>
@@ -3236,67 +3240,67 @@
                   <a:srgbClr val="22282E"/>
                 </a:solidFill>
               </a:rPr>
-              <a:t>•  Dar al agente permisos totales "para que fluya" — Riesgo enorme. Aplica mínimo privilegio y aprobación por acción sensible.</a:t>
-            </a:r>
-          </a:p>
-          <a:p>
-            <a:pPr>
-              <a:spcAft>
-                <a:spcPts val="600"/>
-              </a:spcAft>
-            </a:pPr>
-            <a:r>
-              <a:rPr sz="1500">
-                <a:solidFill>
-                  <a:srgbClr val="22282E"/>
-                </a:solidFill>
-              </a:rPr>
-              <a:t>•  Confiar en datos que el agente lee de la red — Pueden contener prompt injection. Trátalos como entrada no confiable.</a:t>
-            </a:r>
-          </a:p>
-          <a:p>
-            <a:pPr>
-              <a:spcAft>
-                <a:spcPts val="600"/>
-              </a:spcAft>
-            </a:pPr>
-            <a:r>
-              <a:rPr sz="1500">
-                <a:solidFill>
-                  <a:srgbClr val="22282E"/>
-                </a:solidFill>
-              </a:rPr>
-              <a:t>•  No registrar qué hizo el agente — Sin trazabilidad no hay auditoría. Loguea cada tool-call y su resultado.</a:t>
-            </a:r>
-          </a:p>
-          <a:p>
-            <a:pPr>
-              <a:spcAft>
-                <a:spcPts val="600"/>
-              </a:spcAft>
-            </a:pPr>
-            <a:r>
-              <a:rPr sz="1500">
-                <a:solidFill>
-                  <a:srgbClr val="22282E"/>
-                </a:solidFill>
-              </a:rPr>
-              <a:t>•  Exponer credenciales en el contexto del agente — Puede filtrarlas. Usa secretos gestionados, no en el prompt.</a:t>
-            </a:r>
-          </a:p>
-          <a:p>
-            <a:pPr>
-              <a:spcAft>
-                <a:spcPts val="600"/>
-              </a:spcAft>
-            </a:pPr>
-            <a:r>
-              <a:rPr sz="1500">
-                <a:solidFill>
-                  <a:srgbClr val="22282E"/>
-                </a:solidFill>
-              </a:rPr>
-              <a:t>•  Asumir que el servidor MCP es de confianza — Un servidor MCP malicioso puede abusar del cliente. Usa solo servidores auditados.</a:t>
+              <a:t>•  Mapa mental. Dibuja el flujo: agente → mensaje MCP → servidor → herramienta → resultado → agente. Marca dónde entra la aprobación humana.</a:t>
+            </a:r>
+          </a:p>
+          <a:p>
+            <a:pPr>
+              <a:spcAft>
+                <a:spcPts val="600"/>
+              </a:spcAft>
+            </a:pPr>
+            <a:r>
+              <a:rPr sz="1500">
+                <a:solidFill>
+                  <a:srgbClr val="22282E"/>
+                </a:solidFill>
+              </a:rPr>
+              <a:t>•  Inventario de tools. Para un agente de pentest, lista 6 herramientas que expondrías y sus parámetros mínimos (p. ej. scan(target, ports)).</a:t>
+            </a:r>
+          </a:p>
+          <a:p>
+            <a:pPr>
+              <a:spcAft>
+                <a:spcPts val="600"/>
+              </a:spcAft>
+            </a:pPr>
+            <a:r>
+              <a:rPr sz="1500">
+                <a:solidFill>
+                  <a:srgbClr val="22282E"/>
+                </a:solidFill>
+              </a:rPr>
+              <a:t>•  Modelo de permisos. Clasifica esas tools en: auto (solo lectura, p. ej. escaneo pasivo), aprobación requerida (escaneo activo), prohibido a la IA (acciones destructivas).</a:t>
+            </a:r>
+          </a:p>
+          <a:p>
+            <a:pPr>
+              <a:spcAft>
+                <a:spcPts val="600"/>
+              </a:spcAft>
+            </a:pPr>
+            <a:r>
+              <a:rPr sz="1500">
+                <a:solidFill>
+                  <a:srgbClr val="22282E"/>
+                </a:solidFill>
+              </a:rPr>
+              <a:t>•  Superficie de prompt injection. Identifica qué datos "no confiables" podría leer el agente (banners, webs, respuestas de servicios) y cómo podrían manipularlo.</a:t>
+            </a:r>
+          </a:p>
+          <a:p>
+            <a:pPr>
+              <a:spcAft>
+                <a:spcPts val="600"/>
+              </a:spcAft>
+            </a:pPr>
+            <a:r>
+              <a:rPr sz="1500">
+                <a:solidFill>
+                  <a:srgbClr val="22282E"/>
+                </a:solidFill>
+              </a:rPr>
+              <a:t>•  Política. Escribe 5 reglas para operar un agente con herramientas de forma segura.</a:t>
             </a:r>
           </a:p>
         </p:txBody>
@@ -3347,7 +3351,7 @@
                   <a:srgbClr val="0B3D2E"/>
                 </a:solidFill>
               </a:rPr>
-              <a:t>❓ Preguntas frecuentes</a:t>
+              <a:t>✍️ Ejercicios</a:t>
             </a:r>
           </a:p>
         </p:txBody>
@@ -3385,97 +3389,67 @@
                   <a:srgbClr val="22282E"/>
                 </a:solidFill>
               </a:rPr>
-              <a:t>•  ❓ ¿MCP es solo de un proveedor?</a:t>
-            </a:r>
-          </a:p>
-          <a:p>
-            <a:pPr>
-              <a:spcAft>
-                <a:spcPts val="600"/>
-              </a:spcAft>
-            </a:pPr>
-            <a:r>
-              <a:rPr sz="1500">
-                <a:solidFill>
-                  <a:srgbClr val="22282E"/>
-                </a:solidFill>
-              </a:rPr>
-              <a:t>•  No; es un protocolo abierto adoptado por varios clientes de IA. Por eso un mismo servidor MCP</a:t>
-            </a:r>
-          </a:p>
-          <a:p>
-            <a:pPr>
-              <a:spcAft>
-                <a:spcPts val="600"/>
-              </a:spcAft>
-            </a:pPr>
-            <a:r>
-              <a:rPr sz="1500">
-                <a:solidFill>
-                  <a:srgbClr val="22282E"/>
-                </a:solidFill>
-              </a:rPr>
-              <a:t>•  (como kali-mcp) puede usarse desde distintos agentes.</a:t>
-            </a:r>
-          </a:p>
-          <a:p>
-            <a:pPr>
-              <a:spcAft>
-                <a:spcPts val="600"/>
-              </a:spcAft>
-            </a:pPr>
-            <a:r>
-              <a:rPr sz="1500">
-                <a:solidFill>
-                  <a:srgbClr val="22282E"/>
-                </a:solidFill>
-              </a:rPr>
-              <a:t>•  ❓ ¿El agente ejecuta las herramientas directamente en mi máquina?</a:t>
-            </a:r>
-          </a:p>
-          <a:p>
-            <a:pPr>
-              <a:spcAft>
-                <a:spcPts val="600"/>
-              </a:spcAft>
-            </a:pPr>
-            <a:r>
-              <a:rPr sz="1500">
-                <a:solidFill>
-                  <a:srgbClr val="22282E"/>
-                </a:solidFill>
-              </a:rPr>
-              <a:t>•  Depende del diseño. En kali-mcp, las herramientas corren dentro de un contenedor Docker de</a:t>
-            </a:r>
-          </a:p>
-          <a:p>
-            <a:pPr>
-              <a:spcAft>
-                <a:spcPts val="600"/>
-              </a:spcAft>
-            </a:pPr>
-            <a:r>
-              <a:rPr sz="1500">
-                <a:solidFill>
-                  <a:srgbClr val="22282E"/>
-                </a:solidFill>
-              </a:rPr>
-              <a:t>•  Kali, aislado, y el agente habla con un gateway — no ejecuta binarios arbitrarios en tu host.</a:t>
-            </a:r>
-          </a:p>
-          <a:p>
-            <a:pPr>
-              <a:spcAft>
-                <a:spcPts val="600"/>
-              </a:spcAft>
-            </a:pPr>
-            <a:r>
-              <a:rPr sz="1500">
-                <a:solidFill>
-                  <a:srgbClr val="22282E"/>
-                </a:solidFill>
-              </a:rPr>
-              <a:t>•  ❓ ¿Cuál es el mayor riesgo?</a:t>
+              <a:t>•  Explica con tus palabras la diferencia entre un LLM y un agente.</a:t>
+            </a:r>
+          </a:p>
+          <a:p>
+            <a:pPr>
+              <a:spcAft>
+                <a:spcPts val="600"/>
+              </a:spcAft>
+            </a:pPr>
+            <a:r>
+              <a:rPr sz="1500">
+                <a:solidFill>
+                  <a:srgbClr val="22282E"/>
+                </a:solidFill>
+              </a:rPr>
+              <a:t>•  ¿Qué ventaja da MCP frente a integrar cada herramienta a mano?</a:t>
+            </a:r>
+          </a:p>
+          <a:p>
+            <a:pPr>
+              <a:spcAft>
+                <a:spcPts val="600"/>
+              </a:spcAft>
+            </a:pPr>
+            <a:r>
+              <a:rPr sz="1500">
+                <a:solidFill>
+                  <a:srgbClr val="22282E"/>
+                </a:solidFill>
+              </a:rPr>
+              <a:t>•  Da un ejemplo concreto de prompt injection contra un agente de recon.</a:t>
+            </a:r>
+          </a:p>
+          <a:p>
+            <a:pPr>
+              <a:spcAft>
+                <a:spcPts val="600"/>
+              </a:spcAft>
+            </a:pPr>
+            <a:r>
+              <a:rPr sz="1500">
+                <a:solidFill>
+                  <a:srgbClr val="22282E"/>
+                </a:solidFill>
+              </a:rPr>
+              <a:t>•  Diseña la regla de aprobación para una tool que ejecuta sqlmap.</a:t>
+            </a:r>
+          </a:p>
+          <a:p>
+            <a:pPr>
+              <a:spcAft>
+                <a:spcPts val="600"/>
+              </a:spcAft>
+            </a:pPr>
+            <a:r>
+              <a:rPr sz="1500">
+                <a:solidFill>
+                  <a:srgbClr val="22282E"/>
+                </a:solidFill>
+              </a:rPr>
+              <a:t>•  ¿Por qué "mínimo privilegio" aplica también a las herramientas de un agente?</a:t>
             </a:r>
           </a:p>
         </p:txBody>
@@ -3526,7 +3500,7 @@
                   <a:srgbClr val="0B3D2E"/>
                 </a:solidFill>
               </a:rPr>
-              <a:t>🔗 Referencias</a:t>
+              <a:t>📝 Reto verificable</a:t>
             </a:r>
           </a:p>
         </p:txBody>
@@ -3564,6 +3538,468 @@
                   <a:srgbClr val="22282E"/>
                 </a:solidFill>
               </a:rPr>
+              <a:t>•  Diseña, en un diagrama + tabla, la arquitectura de un agente de pentest con MCP: tools</a:t>
+            </a:r>
+          </a:p>
+          <a:p>
+            <a:pPr>
+              <a:spcAft>
+                <a:spcPts val="600"/>
+              </a:spcAft>
+            </a:pPr>
+            <a:r>
+              <a:rPr sz="1500">
+                <a:solidFill>
+                  <a:srgbClr val="22282E"/>
+                </a:solidFill>
+              </a:rPr>
+              <a:t>•  expuestas, nivel de permiso de cada una y los puntos de aprobación humana.</a:t>
+            </a:r>
+          </a:p>
+          <a:p>
+            <a:pPr>
+              <a:spcAft>
+                <a:spcPts val="600"/>
+              </a:spcAft>
+            </a:pPr>
+            <a:r>
+              <a:rPr sz="1500">
+                <a:solidFill>
+                  <a:srgbClr val="22282E"/>
+                </a:solidFill>
+              </a:rPr>
+              <a:t>•  Criterio de aceptación: toda acción con impacto (escaneo activo, explotación, escritura)</a:t>
+            </a:r>
+          </a:p>
+          <a:p>
+            <a:pPr>
+              <a:spcAft>
+                <a:spcPts val="600"/>
+              </a:spcAft>
+            </a:pPr>
+            <a:r>
+              <a:rPr sz="1500">
+                <a:solidFill>
+                  <a:srgbClr val="22282E"/>
+                </a:solidFill>
+              </a:rPr>
+              <a:t>•  requiere aprobación explícita; las de solo lectura pueden ser automáticas; justificas cada decisión.</a:t>
+            </a:r>
+          </a:p>
+        </p:txBody>
+      </p:sp>
+    </p:spTree>
+  </p:cSld>
+  <p:clrMapOvr>
+    <a:masterClrMapping/>
+  </p:clrMapOvr>
+</p:sld>
+</file>
+
+<file path=ppt/slides/slide13.xml><?xml version="1.0" encoding="utf-8"?>
+<p:sld xmlns:a="http://schemas.openxmlformats.org/drawingml/2006/main" xmlns:p="http://schemas.openxmlformats.org/presentationml/2006/main" xmlns:r="http://schemas.openxmlformats.org/officeDocument/2006/relationships">
+  <p:cSld>
+    <p:spTree>
+      <p:nvGrpSpPr>
+        <p:cNvPr id="1" name=""/>
+        <p:cNvGrpSpPr/>
+        <p:nvPr/>
+      </p:nvGrpSpPr>
+      <p:grpSpPr/>
+      <p:sp>
+        <p:nvSpPr>
+          <p:cNvPr id="2" name="TextBox 1"/>
+          <p:cNvSpPr txBox="1"/>
+          <p:nvPr/>
+        </p:nvSpPr>
+        <p:spPr>
+          <a:xfrm>
+            <a:off x="457200" y="320040"/>
+            <a:ext cx="8229600" cy="822960"/>
+          </a:xfrm>
+          <a:prstGeom prst="rect">
+            <a:avLst/>
+          </a:prstGeom>
+          <a:noFill/>
+        </p:spPr>
+        <p:txBody>
+          <a:bodyPr wrap="square">
+            <a:spAutoFit/>
+          </a:bodyPr>
+          <a:lstStyle/>
+          <a:p>
+            <a:r>
+              <a:rPr sz="2600" b="1">
+                <a:solidFill>
+                  <a:srgbClr val="0B3D2E"/>
+                </a:solidFill>
+              </a:rPr>
+              <a:t>⚠️ Errores comunes</a:t>
+            </a:r>
+          </a:p>
+        </p:txBody>
+      </p:sp>
+      <p:sp>
+        <p:nvSpPr>
+          <p:cNvPr id="3" name="TextBox 2"/>
+          <p:cNvSpPr txBox="1"/>
+          <p:nvPr/>
+        </p:nvSpPr>
+        <p:spPr>
+          <a:xfrm>
+            <a:off x="457200" y="1280160"/>
+            <a:ext cx="8229600" cy="4937760"/>
+          </a:xfrm>
+          <a:prstGeom prst="rect">
+            <a:avLst/>
+          </a:prstGeom>
+          <a:noFill/>
+        </p:spPr>
+        <p:txBody>
+          <a:bodyPr wrap="square">
+            <a:spAutoFit/>
+          </a:bodyPr>
+          <a:lstStyle/>
+          <a:p>
+            <a:pPr>
+              <a:spcAft>
+                <a:spcPts val="600"/>
+              </a:spcAft>
+            </a:pPr>
+            <a:r>
+              <a:rPr sz="1500">
+                <a:solidFill>
+                  <a:srgbClr val="22282E"/>
+                </a:solidFill>
+              </a:rPr>
+              <a:t>•  Dar al agente permisos totales "para que fluya" — Riesgo enorme. Aplica mínimo privilegio y aprobación por acción sensible.</a:t>
+            </a:r>
+          </a:p>
+          <a:p>
+            <a:pPr>
+              <a:spcAft>
+                <a:spcPts val="600"/>
+              </a:spcAft>
+            </a:pPr>
+            <a:r>
+              <a:rPr sz="1500">
+                <a:solidFill>
+                  <a:srgbClr val="22282E"/>
+                </a:solidFill>
+              </a:rPr>
+              <a:t>•  Confiar en datos que el agente lee de la red — Pueden contener prompt injection. Trátalos como entrada no confiable.</a:t>
+            </a:r>
+          </a:p>
+          <a:p>
+            <a:pPr>
+              <a:spcAft>
+                <a:spcPts val="600"/>
+              </a:spcAft>
+            </a:pPr>
+            <a:r>
+              <a:rPr sz="1500">
+                <a:solidFill>
+                  <a:srgbClr val="22282E"/>
+                </a:solidFill>
+              </a:rPr>
+              <a:t>•  No registrar qué hizo el agente — Sin trazabilidad no hay auditoría. Loguea cada tool-call y su resultado.</a:t>
+            </a:r>
+          </a:p>
+          <a:p>
+            <a:pPr>
+              <a:spcAft>
+                <a:spcPts val="600"/>
+              </a:spcAft>
+            </a:pPr>
+            <a:r>
+              <a:rPr sz="1500">
+                <a:solidFill>
+                  <a:srgbClr val="22282E"/>
+                </a:solidFill>
+              </a:rPr>
+              <a:t>•  Exponer credenciales en el contexto del agente — Puede filtrarlas. Usa secretos gestionados, no en el prompt.</a:t>
+            </a:r>
+          </a:p>
+          <a:p>
+            <a:pPr>
+              <a:spcAft>
+                <a:spcPts val="600"/>
+              </a:spcAft>
+            </a:pPr>
+            <a:r>
+              <a:rPr sz="1500">
+                <a:solidFill>
+                  <a:srgbClr val="22282E"/>
+                </a:solidFill>
+              </a:rPr>
+              <a:t>•  Asumir que el servidor MCP es de confianza — Un servidor MCP malicioso puede abusar del cliente. Usa solo servidores auditados.</a:t>
+            </a:r>
+          </a:p>
+        </p:txBody>
+      </p:sp>
+    </p:spTree>
+  </p:cSld>
+  <p:clrMapOvr>
+    <a:masterClrMapping/>
+  </p:clrMapOvr>
+</p:sld>
+</file>
+
+<file path=ppt/slides/slide14.xml><?xml version="1.0" encoding="utf-8"?>
+<p:sld xmlns:a="http://schemas.openxmlformats.org/drawingml/2006/main" xmlns:p="http://schemas.openxmlformats.org/presentationml/2006/main" xmlns:r="http://schemas.openxmlformats.org/officeDocument/2006/relationships">
+  <p:cSld>
+    <p:spTree>
+      <p:nvGrpSpPr>
+        <p:cNvPr id="1" name=""/>
+        <p:cNvGrpSpPr/>
+        <p:nvPr/>
+      </p:nvGrpSpPr>
+      <p:grpSpPr/>
+      <p:sp>
+        <p:nvSpPr>
+          <p:cNvPr id="2" name="TextBox 1"/>
+          <p:cNvSpPr txBox="1"/>
+          <p:nvPr/>
+        </p:nvSpPr>
+        <p:spPr>
+          <a:xfrm>
+            <a:off x="457200" y="320040"/>
+            <a:ext cx="8229600" cy="822960"/>
+          </a:xfrm>
+          <a:prstGeom prst="rect">
+            <a:avLst/>
+          </a:prstGeom>
+          <a:noFill/>
+        </p:spPr>
+        <p:txBody>
+          <a:bodyPr wrap="square">
+            <a:spAutoFit/>
+          </a:bodyPr>
+          <a:lstStyle/>
+          <a:p>
+            <a:r>
+              <a:rPr sz="2600" b="1">
+                <a:solidFill>
+                  <a:srgbClr val="0B3D2E"/>
+                </a:solidFill>
+              </a:rPr>
+              <a:t>❓ Preguntas frecuentes</a:t>
+            </a:r>
+          </a:p>
+        </p:txBody>
+      </p:sp>
+      <p:sp>
+        <p:nvSpPr>
+          <p:cNvPr id="3" name="TextBox 2"/>
+          <p:cNvSpPr txBox="1"/>
+          <p:nvPr/>
+        </p:nvSpPr>
+        <p:spPr>
+          <a:xfrm>
+            <a:off x="457200" y="1280160"/>
+            <a:ext cx="8229600" cy="4937760"/>
+          </a:xfrm>
+          <a:prstGeom prst="rect">
+            <a:avLst/>
+          </a:prstGeom>
+          <a:noFill/>
+        </p:spPr>
+        <p:txBody>
+          <a:bodyPr wrap="square">
+            <a:spAutoFit/>
+          </a:bodyPr>
+          <a:lstStyle/>
+          <a:p>
+            <a:pPr>
+              <a:spcAft>
+                <a:spcPts val="600"/>
+              </a:spcAft>
+            </a:pPr>
+            <a:r>
+              <a:rPr sz="1500">
+                <a:solidFill>
+                  <a:srgbClr val="22282E"/>
+                </a:solidFill>
+              </a:rPr>
+              <a:t>•  ❓ ¿MCP es solo de un proveedor?</a:t>
+            </a:r>
+          </a:p>
+          <a:p>
+            <a:pPr>
+              <a:spcAft>
+                <a:spcPts val="600"/>
+              </a:spcAft>
+            </a:pPr>
+            <a:r>
+              <a:rPr sz="1500">
+                <a:solidFill>
+                  <a:srgbClr val="22282E"/>
+                </a:solidFill>
+              </a:rPr>
+              <a:t>•  No; es un protocolo abierto adoptado por varios clientes de IA. Por eso un mismo servidor MCP</a:t>
+            </a:r>
+          </a:p>
+          <a:p>
+            <a:pPr>
+              <a:spcAft>
+                <a:spcPts val="600"/>
+              </a:spcAft>
+            </a:pPr>
+            <a:r>
+              <a:rPr sz="1500">
+                <a:solidFill>
+                  <a:srgbClr val="22282E"/>
+                </a:solidFill>
+              </a:rPr>
+              <a:t>•  (como kali-mcp) puede usarse desde distintos agentes.</a:t>
+            </a:r>
+          </a:p>
+          <a:p>
+            <a:pPr>
+              <a:spcAft>
+                <a:spcPts val="600"/>
+              </a:spcAft>
+            </a:pPr>
+            <a:r>
+              <a:rPr sz="1500">
+                <a:solidFill>
+                  <a:srgbClr val="22282E"/>
+                </a:solidFill>
+              </a:rPr>
+              <a:t>•  ❓ ¿El agente ejecuta las herramientas directamente en mi máquina?</a:t>
+            </a:r>
+          </a:p>
+          <a:p>
+            <a:pPr>
+              <a:spcAft>
+                <a:spcPts val="600"/>
+              </a:spcAft>
+            </a:pPr>
+            <a:r>
+              <a:rPr sz="1500">
+                <a:solidFill>
+                  <a:srgbClr val="22282E"/>
+                </a:solidFill>
+              </a:rPr>
+              <a:t>•  Depende del diseño. En kali-mcp, las herramientas corren dentro de un contenedor Docker de</a:t>
+            </a:r>
+          </a:p>
+          <a:p>
+            <a:pPr>
+              <a:spcAft>
+                <a:spcPts val="600"/>
+              </a:spcAft>
+            </a:pPr>
+            <a:r>
+              <a:rPr sz="1500">
+                <a:solidFill>
+                  <a:srgbClr val="22282E"/>
+                </a:solidFill>
+              </a:rPr>
+              <a:t>•  Kali, aislado, y el agente habla con un gateway — no ejecuta binarios arbitrarios en tu host.</a:t>
+            </a:r>
+          </a:p>
+          <a:p>
+            <a:pPr>
+              <a:spcAft>
+                <a:spcPts val="600"/>
+              </a:spcAft>
+            </a:pPr>
+            <a:r>
+              <a:rPr sz="1500">
+                <a:solidFill>
+                  <a:srgbClr val="22282E"/>
+                </a:solidFill>
+              </a:rPr>
+              <a:t>•  ❓ ¿Cuál es el mayor riesgo?</a:t>
+            </a:r>
+          </a:p>
+        </p:txBody>
+      </p:sp>
+    </p:spTree>
+  </p:cSld>
+  <p:clrMapOvr>
+    <a:masterClrMapping/>
+  </p:clrMapOvr>
+</p:sld>
+</file>
+
+<file path=ppt/slides/slide15.xml><?xml version="1.0" encoding="utf-8"?>
+<p:sld xmlns:a="http://schemas.openxmlformats.org/drawingml/2006/main" xmlns:p="http://schemas.openxmlformats.org/presentationml/2006/main" xmlns:r="http://schemas.openxmlformats.org/officeDocument/2006/relationships">
+  <p:cSld>
+    <p:spTree>
+      <p:nvGrpSpPr>
+        <p:cNvPr id="1" name=""/>
+        <p:cNvGrpSpPr/>
+        <p:nvPr/>
+      </p:nvGrpSpPr>
+      <p:grpSpPr/>
+      <p:sp>
+        <p:nvSpPr>
+          <p:cNvPr id="2" name="TextBox 1"/>
+          <p:cNvSpPr txBox="1"/>
+          <p:nvPr/>
+        </p:nvSpPr>
+        <p:spPr>
+          <a:xfrm>
+            <a:off x="457200" y="320040"/>
+            <a:ext cx="8229600" cy="822960"/>
+          </a:xfrm>
+          <a:prstGeom prst="rect">
+            <a:avLst/>
+          </a:prstGeom>
+          <a:noFill/>
+        </p:spPr>
+        <p:txBody>
+          <a:bodyPr wrap="square">
+            <a:spAutoFit/>
+          </a:bodyPr>
+          <a:lstStyle/>
+          <a:p>
+            <a:r>
+              <a:rPr sz="2600" b="1">
+                <a:solidFill>
+                  <a:srgbClr val="0B3D2E"/>
+                </a:solidFill>
+              </a:rPr>
+              <a:t>🔗 Referencias</a:t>
+            </a:r>
+          </a:p>
+        </p:txBody>
+      </p:sp>
+      <p:sp>
+        <p:nvSpPr>
+          <p:cNvPr id="3" name="TextBox 2"/>
+          <p:cNvSpPr txBox="1"/>
+          <p:nvPr/>
+        </p:nvSpPr>
+        <p:spPr>
+          <a:xfrm>
+            <a:off x="457200" y="1280160"/>
+            <a:ext cx="8229600" cy="4937760"/>
+          </a:xfrm>
+          <a:prstGeom prst="rect">
+            <a:avLst/>
+          </a:prstGeom>
+          <a:noFill/>
+        </p:spPr>
+        <p:txBody>
+          <a:bodyPr wrap="square">
+            <a:spAutoFit/>
+          </a:bodyPr>
+          <a:lstStyle/>
+          <a:p>
+            <a:pPr>
+              <a:spcAft>
+                <a:spcPts val="600"/>
+              </a:spcAft>
+            </a:pPr>
+            <a:r>
+              <a:rPr sz="1500">
+                <a:solidFill>
+                  <a:srgbClr val="22282E"/>
+                </a:solidFill>
+              </a:rPr>
               <a:t>•  Model Context Protocol — especificación</a:t>
             </a:r>
           </a:p>
@@ -3599,6 +4035,81 @@
           </a:p>
         </p:txBody>
       </p:sp>
+    </p:spTree>
+  </p:cSld>
+  <p:clrMapOvr>
+    <a:masterClrMapping/>
+  </p:clrMapOvr>
+</p:sld>
+</file>
+
+<file path=ppt/slides/slide16.xml><?xml version="1.0" encoding="utf-8"?>
+<p:sld xmlns:a="http://schemas.openxmlformats.org/drawingml/2006/main" xmlns:p="http://schemas.openxmlformats.org/presentationml/2006/main" xmlns:r="http://schemas.openxmlformats.org/officeDocument/2006/relationships">
+  <p:cSld>
+    <p:spTree>
+      <p:nvGrpSpPr>
+        <p:cNvPr id="1" name=""/>
+        <p:cNvGrpSpPr/>
+        <p:nvPr/>
+      </p:nvGrpSpPr>
+      <p:grpSpPr/>
+      <p:sp>
+        <p:nvSpPr>
+          <p:cNvPr id="2" name="TextBox 1"/>
+          <p:cNvSpPr txBox="1"/>
+          <p:nvPr/>
+        </p:nvSpPr>
+        <p:spPr>
+          <a:xfrm>
+            <a:off x="457200" y="274320"/>
+            <a:ext cx="8229600" cy="640080"/>
+          </a:xfrm>
+          <a:prstGeom prst="rect">
+            <a:avLst/>
+          </a:prstGeom>
+          <a:noFill/>
+        </p:spPr>
+        <p:txBody>
+          <a:bodyPr wrap="square">
+            <a:spAutoFit/>
+          </a:bodyPr>
+          <a:lstStyle/>
+          <a:p>
+            <a:r>
+              <a:rPr sz="2200" b="1">
+                <a:solidFill>
+                  <a:srgbClr val="0B3D2E"/>
+                </a:solidFill>
+              </a:rPr>
+              <a:t>Diagrama de la clase</a:t>
+            </a:r>
+          </a:p>
+        </p:txBody>
+      </p:sp>
+      <p:pic>
+        <p:nvPicPr>
+          <p:cNvPr id="3" name="Picture 2" descr="62559e133d9cfe6b.png"/>
+          <p:cNvPicPr>
+            <a:picLocks noChangeAspect="1"/>
+          </p:cNvPicPr>
+          <p:nvPr/>
+        </p:nvPicPr>
+        <p:blipFill>
+          <a:blip r:embed="rId2"/>
+          <a:stretch>
+            <a:fillRect/>
+          </a:stretch>
+        </p:blipFill>
+        <p:spPr>
+          <a:xfrm>
+            <a:off x="457200" y="3333404"/>
+            <a:ext cx="8229600" cy="831272"/>
+          </a:xfrm>
+          <a:prstGeom prst="rect">
+            <a:avLst/>
+          </a:prstGeom>
+        </p:spPr>
+      </p:pic>
     </p:spTree>
   </p:cSld>
   <p:clrMapOvr>
@@ -4107,7 +4618,7 @@
                   <a:srgbClr val="0B3D2E"/>
                 </a:solidFill>
               </a:rPr>
-              <a:t>📖 Definiciones y características</a:t>
+              <a:t>🧠 Explicación en profundidad</a:t>
             </a:r>
           </a:p>
         </p:txBody>
@@ -4145,97 +4656,37 @@
                   <a:srgbClr val="22282E"/>
                 </a:solidFill>
               </a:rPr>
-              <a:t>•  Agente de IA</a:t>
-            </a:r>
-          </a:p>
-          <a:p>
-            <a:pPr>
-              <a:spcAft>
-                <a:spcPts val="600"/>
-              </a:spcAft>
-            </a:pPr>
-            <a:r>
-              <a:rPr sz="1500">
-                <a:solidFill>
-                  <a:srgbClr val="22282E"/>
-                </a:solidFill>
-              </a:rPr>
-              <a:t>•  LLM que, en un bucle, decide qué herramienta usar, la invoca, observa el resultado y continúa hasta cumplir un objetivo. Característica clave: actúa sobre el mundo.</a:t>
-            </a:r>
-          </a:p>
-          <a:p>
-            <a:pPr>
-              <a:spcAft>
-                <a:spcPts val="600"/>
-              </a:spcAft>
-            </a:pPr>
-            <a:r>
-              <a:rPr sz="1500">
-                <a:solidFill>
-                  <a:srgbClr val="22282E"/>
-                </a:solidFill>
-              </a:rPr>
-              <a:t>•  MCP (Model Context Protocol)</a:t>
-            </a:r>
-          </a:p>
-          <a:p>
-            <a:pPr>
-              <a:spcAft>
-                <a:spcPts val="600"/>
-              </a:spcAft>
-            </a:pPr>
-            <a:r>
-              <a:rPr sz="1500">
-                <a:solidFill>
-                  <a:srgbClr val="22282E"/>
-                </a:solidFill>
-              </a:rPr>
-              <a:t>•  Protocolo abierto que estandariza cómo un cliente de IA se conecta a servidores que exponen herramientas, recursos y prompts. Evita integraciones a medida para cada herramienta.</a:t>
-            </a:r>
-          </a:p>
-          <a:p>
-            <a:pPr>
-              <a:spcAft>
-                <a:spcPts val="600"/>
-              </a:spcAft>
-            </a:pPr>
-            <a:r>
-              <a:rPr sz="1500">
-                <a:solidFill>
-                  <a:srgbClr val="22282E"/>
-                </a:solidFill>
-              </a:rPr>
-              <a:t>•  Servidor MCP</a:t>
-            </a:r>
-          </a:p>
-          <a:p>
-            <a:pPr>
-              <a:spcAft>
-                <a:spcPts val="600"/>
-              </a:spcAft>
-            </a:pPr>
-            <a:r>
-              <a:rPr sz="1500">
-                <a:solidFill>
-                  <a:srgbClr val="22282E"/>
-                </a:solidFill>
-              </a:rPr>
-              <a:t>•  Proceso que expone capacidades (p. ej. "ejecutar nmap", "leer un archivo") a través del protocolo, para que cualquier cliente compatible las use.</a:t>
-            </a:r>
-          </a:p>
-          <a:p>
-            <a:pPr>
-              <a:spcAft>
-                <a:spcPts val="600"/>
-              </a:spcAft>
-            </a:pPr>
-            <a:r>
-              <a:rPr sz="1500">
-                <a:solidFill>
-                  <a:srgbClr val="22282E"/>
-                </a:solidFill>
-              </a:rPr>
-              <a:t>•  Tool (herramienta)</a:t>
+              <a:t>•  Un agente combina modelo, estado y herramientas. MCP estandariza intercambio de contexto y capacidades, pero no convierte un servidor en confiable. Cliente, servidor, recurso y herramienta forman…</a:t>
+            </a:r>
+          </a:p>
+          <a:p>
+            <a:pPr>
+              <a:spcAft>
+                <a:spcPts val="600"/>
+              </a:spcAft>
+            </a:pPr>
+            <a:r>
+              <a:rPr sz="1500">
+                <a:solidFill>
+                  <a:srgbClr val="22282E"/>
+                </a:solidFill>
+              </a:rPr>
+              <a:t>•  El diagrama separa lenguaje de autoridad. El modelo puede proponer; la política determina si la operación pertenece al alcance; la herramienta produce evidencia; y una persona o control determinista…</a:t>
+            </a:r>
+          </a:p>
+          <a:p>
+            <a:pPr>
+              <a:spcAft>
+                <a:spcPts val="600"/>
+              </a:spcAft>
+            </a:pPr>
+            <a:r>
+              <a:rPr sz="1500">
+                <a:solidFill>
+                  <a:srgbClr val="22282E"/>
+                </a:solidFill>
+              </a:rPr>
+              <a:t>•  Un servidor describe una herramienta como lectura, pero ejecuta cambios. La política se basa en capacidad y prueba, no en descripción.</a:t>
             </a:r>
           </a:p>
         </p:txBody>
@@ -4286,7 +4737,7 @@
                   <a:srgbClr val="0B3D2E"/>
                 </a:solidFill>
               </a:rPr>
-              <a:t>🧰 Herramientas y preparación</a:t>
+              <a:t>📔 Glosario operativo</a:t>
             </a:r>
           </a:p>
         </p:txBody>
@@ -4324,37 +4775,52 @@
                   <a:srgbClr val="22282E"/>
                 </a:solidFill>
               </a:rPr>
-              <a:t>•  Un cliente de IA con soporte MCP (p. ej. Claude Code) y, opcionalmente, un servidor MCP de</a:t>
-            </a:r>
-          </a:p>
-          <a:p>
-            <a:pPr>
-              <a:spcAft>
-                <a:spcPts val="600"/>
-              </a:spcAft>
-            </a:pPr>
-            <a:r>
-              <a:rPr sz="1500">
-                <a:solidFill>
-                  <a:srgbClr val="22282E"/>
-                </a:solidFill>
-              </a:rPr>
-              <a:t>•  ejemplo. En la clase siguiente montaremos kali-mcp. Aquí basta con entender la arquitectura</a:t>
-            </a:r>
-          </a:p>
-          <a:p>
-            <a:pPr>
-              <a:spcAft>
-                <a:spcPts val="600"/>
-              </a:spcAft>
-            </a:pPr>
-            <a:r>
-              <a:rPr sz="1500">
-                <a:solidFill>
-                  <a:srgbClr val="22282E"/>
-                </a:solidFill>
-              </a:rPr>
-              <a:t>•  y experimentar con un servidor MCP sencillo si lo tienes disponible.</a:t>
+              <a:t>•  Término — Definición</a:t>
+            </a:r>
+          </a:p>
+          <a:p>
+            <a:pPr>
+              <a:spcAft>
+                <a:spcPts val="600"/>
+              </a:spcAft>
+            </a:pPr>
+            <a:r>
+              <a:rPr sz="1500">
+                <a:solidFill>
+                  <a:srgbClr val="22282E"/>
+                </a:solidFill>
+              </a:rPr>
+              <a:t>•  Capability — Operación concreta que un componente ofrece bajo permisos.</a:t>
+            </a:r>
+          </a:p>
+          <a:p>
+            <a:pPr>
+              <a:spcAft>
+                <a:spcPts val="600"/>
+              </a:spcAft>
+            </a:pPr>
+            <a:r>
+              <a:rPr sz="1500">
+                <a:solidFill>
+                  <a:srgbClr val="22282E"/>
+                </a:solidFill>
+              </a:rPr>
+              <a:t>•  Guardrail — Capa que reduce una capacidad o detecta su uso; no garantía absoluta.</a:t>
+            </a:r>
+          </a:p>
+          <a:p>
+            <a:pPr>
+              <a:spcAft>
+                <a:spcPts val="600"/>
+              </a:spcAft>
+            </a:pPr>
+            <a:r>
+              <a:rPr sz="1500">
+                <a:solidFill>
+                  <a:srgbClr val="22282E"/>
+                </a:solidFill>
+              </a:rPr>
+              <a:t>•  Audit trail — Registro ordenado de solicitudes, decisiones, ejecuciones y resultados.</a:t>
             </a:r>
           </a:p>
         </p:txBody>
@@ -4405,7 +4871,7 @@
                   <a:srgbClr val="0B3D2E"/>
                 </a:solidFill>
               </a:rPr>
-              <a:t>🧪 Laboratorio guiado</a:t>
+              <a:t>✅ Criterio de dominio</a:t>
             </a:r>
           </a:p>
         </p:txBody>
@@ -4443,67 +4909,7 @@
                   <a:srgbClr val="22282E"/>
                 </a:solidFill>
               </a:rPr>
-              <a:t>•  Mapa mental. Dibuja el flujo: agente → mensaje MCP → servidor → herramienta → resultado → agente. Marca dónde entra la aprobación humana.</a:t>
-            </a:r>
-          </a:p>
-          <a:p>
-            <a:pPr>
-              <a:spcAft>
-                <a:spcPts val="600"/>
-              </a:spcAft>
-            </a:pPr>
-            <a:r>
-              <a:rPr sz="1500">
-                <a:solidFill>
-                  <a:srgbClr val="22282E"/>
-                </a:solidFill>
-              </a:rPr>
-              <a:t>•  Inventario de tools. Para un agente de pentest, lista 6 herramientas que expondrías y sus parámetros mínimos (p. ej. scan(target, ports)).</a:t>
-            </a:r>
-          </a:p>
-          <a:p>
-            <a:pPr>
-              <a:spcAft>
-                <a:spcPts val="600"/>
-              </a:spcAft>
-            </a:pPr>
-            <a:r>
-              <a:rPr sz="1500">
-                <a:solidFill>
-                  <a:srgbClr val="22282E"/>
-                </a:solidFill>
-              </a:rPr>
-              <a:t>•  Modelo de permisos. Clasifica esas tools en: auto (solo lectura, p. ej. escaneo pasivo), aprobación requerida (escaneo activo), prohibido a la IA (acciones destructivas).</a:t>
-            </a:r>
-          </a:p>
-          <a:p>
-            <a:pPr>
-              <a:spcAft>
-                <a:spcPts val="600"/>
-              </a:spcAft>
-            </a:pPr>
-            <a:r>
-              <a:rPr sz="1500">
-                <a:solidFill>
-                  <a:srgbClr val="22282E"/>
-                </a:solidFill>
-              </a:rPr>
-              <a:t>•  Superficie de prompt injection. Identifica qué datos "no confiables" podría leer el agente (banners, webs, respuestas de servicios) y cómo podrían manipularlo.</a:t>
-            </a:r>
-          </a:p>
-          <a:p>
-            <a:pPr>
-              <a:spcAft>
-                <a:spcPts val="600"/>
-              </a:spcAft>
-            </a:pPr>
-            <a:r>
-              <a:rPr sz="1500">
-                <a:solidFill>
-                  <a:srgbClr val="22282E"/>
-                </a:solidFill>
-              </a:rPr>
-              <a:t>•  Política. Escribe 5 reglas para operar un agente con herramientas de forma segura.</a:t>
+              <a:t>•  El alumno demuestra dominio cuando reproduce el flujo completo, puede atribuir cada acción, evita que texto no confiable otorgue autoridad y explica qué control contiene un fallo del modelo.</a:t>
             </a:r>
           </a:p>
         </p:txBody>
@@ -4554,7 +4960,7 @@
                   <a:srgbClr val="0B3D2E"/>
                 </a:solidFill>
               </a:rPr>
-              <a:t>✍️ Ejercicios</a:t>
+              <a:t>📖 Definiciones y características</a:t>
             </a:r>
           </a:p>
         </p:txBody>
@@ -4592,67 +4998,97 @@
                   <a:srgbClr val="22282E"/>
                 </a:solidFill>
               </a:rPr>
-              <a:t>•  Explica con tus palabras la diferencia entre un LLM y un agente.</a:t>
-            </a:r>
-          </a:p>
-          <a:p>
-            <a:pPr>
-              <a:spcAft>
-                <a:spcPts val="600"/>
-              </a:spcAft>
-            </a:pPr>
-            <a:r>
-              <a:rPr sz="1500">
-                <a:solidFill>
-                  <a:srgbClr val="22282E"/>
-                </a:solidFill>
-              </a:rPr>
-              <a:t>•  ¿Qué ventaja da MCP frente a integrar cada herramienta a mano?</a:t>
-            </a:r>
-          </a:p>
-          <a:p>
-            <a:pPr>
-              <a:spcAft>
-                <a:spcPts val="600"/>
-              </a:spcAft>
-            </a:pPr>
-            <a:r>
-              <a:rPr sz="1500">
-                <a:solidFill>
-                  <a:srgbClr val="22282E"/>
-                </a:solidFill>
-              </a:rPr>
-              <a:t>•  Da un ejemplo concreto de prompt injection contra un agente de recon.</a:t>
-            </a:r>
-          </a:p>
-          <a:p>
-            <a:pPr>
-              <a:spcAft>
-                <a:spcPts val="600"/>
-              </a:spcAft>
-            </a:pPr>
-            <a:r>
-              <a:rPr sz="1500">
-                <a:solidFill>
-                  <a:srgbClr val="22282E"/>
-                </a:solidFill>
-              </a:rPr>
-              <a:t>•  Diseña la regla de aprobación para una tool que ejecuta sqlmap.</a:t>
-            </a:r>
-          </a:p>
-          <a:p>
-            <a:pPr>
-              <a:spcAft>
-                <a:spcPts val="600"/>
-              </a:spcAft>
-            </a:pPr>
-            <a:r>
-              <a:rPr sz="1500">
-                <a:solidFill>
-                  <a:srgbClr val="22282E"/>
-                </a:solidFill>
-              </a:rPr>
-              <a:t>•  ¿Por qué "mínimo privilegio" aplica también a las herramientas de un agente?</a:t>
+              <a:t>•  Agente de IA</a:t>
+            </a:r>
+          </a:p>
+          <a:p>
+            <a:pPr>
+              <a:spcAft>
+                <a:spcPts val="600"/>
+              </a:spcAft>
+            </a:pPr>
+            <a:r>
+              <a:rPr sz="1500">
+                <a:solidFill>
+                  <a:srgbClr val="22282E"/>
+                </a:solidFill>
+              </a:rPr>
+              <a:t>•  LLM que, en un bucle, decide qué herramienta usar, la invoca, observa el resultado y continúa hasta cumplir un objetivo. Característica clave: actúa sobre el mundo.</a:t>
+            </a:r>
+          </a:p>
+          <a:p>
+            <a:pPr>
+              <a:spcAft>
+                <a:spcPts val="600"/>
+              </a:spcAft>
+            </a:pPr>
+            <a:r>
+              <a:rPr sz="1500">
+                <a:solidFill>
+                  <a:srgbClr val="22282E"/>
+                </a:solidFill>
+              </a:rPr>
+              <a:t>•  MCP (Model Context Protocol)</a:t>
+            </a:r>
+          </a:p>
+          <a:p>
+            <a:pPr>
+              <a:spcAft>
+                <a:spcPts val="600"/>
+              </a:spcAft>
+            </a:pPr>
+            <a:r>
+              <a:rPr sz="1500">
+                <a:solidFill>
+                  <a:srgbClr val="22282E"/>
+                </a:solidFill>
+              </a:rPr>
+              <a:t>•  Protocolo abierto que estandariza cómo un cliente de IA se conecta a servidores que exponen herramientas, recursos y prompts. Evita integraciones a medida para cada herramienta.</a:t>
+            </a:r>
+          </a:p>
+          <a:p>
+            <a:pPr>
+              <a:spcAft>
+                <a:spcPts val="600"/>
+              </a:spcAft>
+            </a:pPr>
+            <a:r>
+              <a:rPr sz="1500">
+                <a:solidFill>
+                  <a:srgbClr val="22282E"/>
+                </a:solidFill>
+              </a:rPr>
+              <a:t>•  Servidor MCP</a:t>
+            </a:r>
+          </a:p>
+          <a:p>
+            <a:pPr>
+              <a:spcAft>
+                <a:spcPts val="600"/>
+              </a:spcAft>
+            </a:pPr>
+            <a:r>
+              <a:rPr sz="1500">
+                <a:solidFill>
+                  <a:srgbClr val="22282E"/>
+                </a:solidFill>
+              </a:rPr>
+              <a:t>•  Proceso que expone capacidades (p. ej. "ejecutar nmap", "leer un archivo") a través del protocolo, para que cualquier cliente compatible las use.</a:t>
+            </a:r>
+          </a:p>
+          <a:p>
+            <a:pPr>
+              <a:spcAft>
+                <a:spcPts val="600"/>
+              </a:spcAft>
+            </a:pPr>
+            <a:r>
+              <a:rPr sz="1500">
+                <a:solidFill>
+                  <a:srgbClr val="22282E"/>
+                </a:solidFill>
+              </a:rPr>
+              <a:t>•  Tool (herramienta)</a:t>
             </a:r>
           </a:p>
         </p:txBody>
@@ -4703,7 +5139,7 @@
                   <a:srgbClr val="0B3D2E"/>
                 </a:solidFill>
               </a:rPr>
-              <a:t>📝 Reto verificable</a:t>
+              <a:t>🧰 Herramientas y preparación</a:t>
             </a:r>
           </a:p>
         </p:txBody>
@@ -4741,52 +5177,37 @@
                   <a:srgbClr val="22282E"/>
                 </a:solidFill>
               </a:rPr>
-              <a:t>•  Diseña, en un diagrama + tabla, la arquitectura de un agente de pentest con MCP: tools</a:t>
-            </a:r>
-          </a:p>
-          <a:p>
-            <a:pPr>
-              <a:spcAft>
-                <a:spcPts val="600"/>
-              </a:spcAft>
-            </a:pPr>
-            <a:r>
-              <a:rPr sz="1500">
-                <a:solidFill>
-                  <a:srgbClr val="22282E"/>
-                </a:solidFill>
-              </a:rPr>
-              <a:t>•  expuestas, nivel de permiso de cada una y los puntos de aprobación humana.</a:t>
-            </a:r>
-          </a:p>
-          <a:p>
-            <a:pPr>
-              <a:spcAft>
-                <a:spcPts val="600"/>
-              </a:spcAft>
-            </a:pPr>
-            <a:r>
-              <a:rPr sz="1500">
-                <a:solidFill>
-                  <a:srgbClr val="22282E"/>
-                </a:solidFill>
-              </a:rPr>
-              <a:t>•  Criterio de aceptación: toda acción con impacto (escaneo activo, explotación, escritura)</a:t>
-            </a:r>
-          </a:p>
-          <a:p>
-            <a:pPr>
-              <a:spcAft>
-                <a:spcPts val="600"/>
-              </a:spcAft>
-            </a:pPr>
-            <a:r>
-              <a:rPr sz="1500">
-                <a:solidFill>
-                  <a:srgbClr val="22282E"/>
-                </a:solidFill>
-              </a:rPr>
-              <a:t>•  requiere aprobación explícita; las de solo lectura pueden ser automáticas; justificas cada decisión.</a:t>
+              <a:t>•  Un cliente de IA con soporte MCP (p. ej. Claude Code) y, opcionalmente, un servidor MCP de</a:t>
+            </a:r>
+          </a:p>
+          <a:p>
+            <a:pPr>
+              <a:spcAft>
+                <a:spcPts val="600"/>
+              </a:spcAft>
+            </a:pPr>
+            <a:r>
+              <a:rPr sz="1500">
+                <a:solidFill>
+                  <a:srgbClr val="22282E"/>
+                </a:solidFill>
+              </a:rPr>
+              <a:t>•  ejemplo. En la clase siguiente montaremos kali-mcp. Aquí basta con entender la arquitectura</a:t>
+            </a:r>
+          </a:p>
+          <a:p>
+            <a:pPr>
+              <a:spcAft>
+                <a:spcPts val="600"/>
+              </a:spcAft>
+            </a:pPr>
+            <a:r>
+              <a:rPr sz="1500">
+                <a:solidFill>
+                  <a:srgbClr val="22282E"/>
+                </a:solidFill>
+              </a:rPr>
+              <a:t>•  y experimentar con un servidor MCP sencillo si lo tienes disponible.</a:t>
             </a:r>
           </a:p>
         </p:txBody>
